--- a/class/cloud_infra_mgmt/09주차_Terraform_IaC기초/01_강의자료/3차시_destroy와State파일.pptx
+++ b/class/cloud_infra_mgmt/09주차_Terraform_IaC기초/01_강의자료/3차시_destroy와State파일.pptx
@@ -9779,7 +9779,7 @@
               </a:lnSpc>
             </a:pPr>
             <a:r>
-              <a:rPr sz="1500" b="1">
+              <a:rPr sz="1700" b="1">
                 <a:solidFill>
                   <a:srgbClr val="0D9488"/>
                 </a:solidFill>
@@ -9788,7 +9788,7 @@
               <a:t>●  </a:t>
             </a:r>
             <a:r>
-              <a:rPr sz="1500" b="0">
+              <a:rPr sz="1700" b="0">
                 <a:solidFill>
                   <a:srgbClr val="222733"/>
                 </a:solidFill>
@@ -9804,7 +9804,7 @@
               </a:lnSpc>
             </a:pPr>
             <a:r>
-              <a:rPr sz="1500" b="1">
+              <a:rPr sz="1700" b="1">
                 <a:solidFill>
                   <a:srgbClr val="0D9488"/>
                 </a:solidFill>
@@ -9813,7 +9813,7 @@
               <a:t>●  </a:t>
             </a:r>
             <a:r>
-              <a:rPr sz="1500" b="0">
+              <a:rPr sz="1700" b="0">
                 <a:solidFill>
                   <a:srgbClr val="222733"/>
                 </a:solidFill>
@@ -9829,7 +9829,7 @@
               </a:lnSpc>
             </a:pPr>
             <a:r>
-              <a:rPr sz="1500" b="1">
+              <a:rPr sz="1700" b="1">
                 <a:solidFill>
                   <a:srgbClr val="0D9488"/>
                 </a:solidFill>
@@ -9838,7 +9838,7 @@
               <a:t>●  </a:t>
             </a:r>
             <a:r>
-              <a:rPr sz="1500" b="0">
+              <a:rPr sz="1700" b="0">
                 <a:solidFill>
                   <a:srgbClr val="222733"/>
                 </a:solidFill>

--- a/class/cloud_infra_mgmt/09주차_Terraform_IaC기초/01_강의자료/3차시_destroy와State파일.pptx
+++ b/class/cloud_infra_mgmt/09주차_Terraform_IaC기초/01_강의자료/3차시_destroy와State파일.pptx
@@ -5349,7 +5349,7 @@
           <a:p>
             <a:pPr>
               <a:lnSpc>
-                <a:spcPct val="115000"/>
+                <a:spcPct val="149500"/>
               </a:lnSpc>
             </a:pPr>
             <a:r>
@@ -5374,7 +5374,7 @@
           <a:p>
             <a:pPr>
               <a:lnSpc>
-                <a:spcPct val="115000"/>
+                <a:spcPct val="149500"/>
               </a:lnSpc>
             </a:pPr>
             <a:r>
@@ -5399,7 +5399,7 @@
           <a:p>
             <a:pPr>
               <a:lnSpc>
-                <a:spcPct val="115000"/>
+                <a:spcPct val="149500"/>
               </a:lnSpc>
             </a:pPr>
             <a:r>
@@ -5790,7 +5790,7 @@
           <a:p>
             <a:pPr>
               <a:lnSpc>
-                <a:spcPct val="115000"/>
+                <a:spcPct val="149500"/>
               </a:lnSpc>
             </a:pPr>
             <a:r>
@@ -5815,7 +5815,7 @@
           <a:p>
             <a:pPr>
               <a:lnSpc>
-                <a:spcPct val="115000"/>
+                <a:spcPct val="149500"/>
               </a:lnSpc>
             </a:pPr>
             <a:r>
@@ -5840,7 +5840,7 @@
           <a:p>
             <a:pPr>
               <a:lnSpc>
-                <a:spcPct val="115000"/>
+                <a:spcPct val="149500"/>
               </a:lnSpc>
             </a:pPr>
             <a:r>
@@ -5865,7 +5865,7 @@
           <a:p>
             <a:pPr>
               <a:lnSpc>
-                <a:spcPct val="115000"/>
+                <a:spcPct val="149500"/>
               </a:lnSpc>
             </a:pPr>
             <a:r>
@@ -7373,16 +7373,104 @@
       </p:sp>
       <p:sp>
         <p:nvSpPr>
-          <p:cNvPr id="7" name="Isosceles Triangle 6"/>
+          <p:cNvPr id="7" name="Rectangle 6"/>
           <p:cNvSpPr/>
           <p:nvPr/>
         </p:nvSpPr>
         <p:spPr>
-          <a:xfrm rot="5400000">
-            <a:off x="3495751" y="1673352"/>
-            <a:ext cx="146304" cy="146304"/>
-          </a:xfrm>
-          <a:prstGeom prst="triangle">
+          <a:xfrm>
+            <a:off x="5096865" y="1730959"/>
+            <a:ext cx="1995220" cy="31089"/>
+          </a:xfrm>
+          <a:prstGeom prst="rect">
+            <a:avLst/>
+          </a:prstGeom>
+          <a:solidFill>
+            <a:srgbClr val="14B8A6"/>
+          </a:solidFill>
+          <a:ln>
+            <a:noFill/>
+          </a:ln>
+          <a:effectLst/>
+        </p:spPr>
+        <p:style>
+          <a:lnRef idx="1">
+            <a:schemeClr val="accent1"/>
+          </a:lnRef>
+          <a:fillRef idx="3">
+            <a:schemeClr val="accent1"/>
+          </a:fillRef>
+          <a:effectRef idx="2">
+            <a:schemeClr val="accent1"/>
+          </a:effectRef>
+          <a:fontRef idx="minor">
+            <a:schemeClr val="lt1"/>
+          </a:fontRef>
+        </p:style>
+        <p:txBody>
+          <a:bodyPr rtlCol="0" anchor="ctr"/>
+          <a:lstStyle/>
+          <a:p>
+            <a:pPr algn="ctr"/>
+          </a:p>
+        </p:txBody>
+      </p:sp>
+      <p:sp>
+        <p:nvSpPr>
+          <p:cNvPr id="8" name="Rectangle 7"/>
+          <p:cNvSpPr/>
+          <p:nvPr/>
+        </p:nvSpPr>
+        <p:spPr>
+          <a:xfrm>
+            <a:off x="7622438" y="1730959"/>
+            <a:ext cx="1995220" cy="31089"/>
+          </a:xfrm>
+          <a:prstGeom prst="rect">
+            <a:avLst/>
+          </a:prstGeom>
+          <a:solidFill>
+            <a:srgbClr val="14B8A6"/>
+          </a:solidFill>
+          <a:ln>
+            <a:noFill/>
+          </a:ln>
+          <a:effectLst/>
+        </p:spPr>
+        <p:style>
+          <a:lnRef idx="1">
+            <a:schemeClr val="accent1"/>
+          </a:lnRef>
+          <a:fillRef idx="3">
+            <a:schemeClr val="accent1"/>
+          </a:fillRef>
+          <a:effectRef idx="2">
+            <a:schemeClr val="accent1"/>
+          </a:effectRef>
+          <a:fontRef idx="minor">
+            <a:schemeClr val="lt1"/>
+          </a:fontRef>
+        </p:style>
+        <p:txBody>
+          <a:bodyPr rtlCol="0" anchor="ctr"/>
+          <a:lstStyle/>
+          <a:p>
+            <a:pPr algn="ctr"/>
+          </a:p>
+        </p:txBody>
+      </p:sp>
+      <p:sp>
+        <p:nvSpPr>
+          <p:cNvPr id="9" name="Oval 8"/>
+          <p:cNvSpPr/>
+          <p:nvPr/>
+        </p:nvSpPr>
+        <p:spPr>
+          <a:xfrm>
+            <a:off x="2040940" y="1481328"/>
+            <a:ext cx="530352" cy="530352"/>
+          </a:xfrm>
+          <a:prstGeom prst="ellipse">
             <a:avLst/>
           </a:prstGeom>
           <a:solidFill>
@@ -7417,227 +7505,7 @@
       </p:sp>
       <p:sp>
         <p:nvSpPr>
-          <p:cNvPr id="8" name="Rectangle 7"/>
-          <p:cNvSpPr/>
-          <p:nvPr/>
-        </p:nvSpPr>
-        <p:spPr>
-          <a:xfrm>
-            <a:off x="5096865" y="1730959"/>
-            <a:ext cx="1995220" cy="31089"/>
-          </a:xfrm>
-          <a:prstGeom prst="rect">
-            <a:avLst/>
-          </a:prstGeom>
-          <a:solidFill>
-            <a:srgbClr val="14B8A6"/>
-          </a:solidFill>
-          <a:ln>
-            <a:noFill/>
-          </a:ln>
-          <a:effectLst/>
-        </p:spPr>
-        <p:style>
-          <a:lnRef idx="1">
-            <a:schemeClr val="accent1"/>
-          </a:lnRef>
-          <a:fillRef idx="3">
-            <a:schemeClr val="accent1"/>
-          </a:fillRef>
-          <a:effectRef idx="2">
-            <a:schemeClr val="accent1"/>
-          </a:effectRef>
-          <a:fontRef idx="minor">
-            <a:schemeClr val="lt1"/>
-          </a:fontRef>
-        </p:style>
-        <p:txBody>
-          <a:bodyPr rtlCol="0" anchor="ctr"/>
-          <a:lstStyle/>
-          <a:p>
-            <a:pPr algn="ctr"/>
-          </a:p>
-        </p:txBody>
-      </p:sp>
-      <p:sp>
-        <p:nvSpPr>
-          <p:cNvPr id="9" name="Isosceles Triangle 8"/>
-          <p:cNvSpPr/>
-          <p:nvPr/>
-        </p:nvSpPr>
-        <p:spPr>
-          <a:xfrm rot="5400000">
-            <a:off x="6021324" y="1673352"/>
-            <a:ext cx="146304" cy="146304"/>
-          </a:xfrm>
-          <a:prstGeom prst="triangle">
-            <a:avLst/>
-          </a:prstGeom>
-          <a:solidFill>
-            <a:srgbClr val="0D9488"/>
-          </a:solidFill>
-          <a:ln>
-            <a:noFill/>
-          </a:ln>
-          <a:effectLst/>
-        </p:spPr>
-        <p:style>
-          <a:lnRef idx="1">
-            <a:schemeClr val="accent1"/>
-          </a:lnRef>
-          <a:fillRef idx="3">
-            <a:schemeClr val="accent1"/>
-          </a:fillRef>
-          <a:effectRef idx="2">
-            <a:schemeClr val="accent1"/>
-          </a:effectRef>
-          <a:fontRef idx="minor">
-            <a:schemeClr val="lt1"/>
-          </a:fontRef>
-        </p:style>
-        <p:txBody>
-          <a:bodyPr rtlCol="0" anchor="ctr"/>
-          <a:lstStyle/>
-          <a:p>
-            <a:pPr algn="ctr"/>
-          </a:p>
-        </p:txBody>
-      </p:sp>
-      <p:sp>
-        <p:nvSpPr>
-          <p:cNvPr id="10" name="Rectangle 9"/>
-          <p:cNvSpPr/>
-          <p:nvPr/>
-        </p:nvSpPr>
-        <p:spPr>
-          <a:xfrm>
-            <a:off x="7622438" y="1730959"/>
-            <a:ext cx="1995220" cy="31089"/>
-          </a:xfrm>
-          <a:prstGeom prst="rect">
-            <a:avLst/>
-          </a:prstGeom>
-          <a:solidFill>
-            <a:srgbClr val="14B8A6"/>
-          </a:solidFill>
-          <a:ln>
-            <a:noFill/>
-          </a:ln>
-          <a:effectLst/>
-        </p:spPr>
-        <p:style>
-          <a:lnRef idx="1">
-            <a:schemeClr val="accent1"/>
-          </a:lnRef>
-          <a:fillRef idx="3">
-            <a:schemeClr val="accent1"/>
-          </a:fillRef>
-          <a:effectRef idx="2">
-            <a:schemeClr val="accent1"/>
-          </a:effectRef>
-          <a:fontRef idx="minor">
-            <a:schemeClr val="lt1"/>
-          </a:fontRef>
-        </p:style>
-        <p:txBody>
-          <a:bodyPr rtlCol="0" anchor="ctr"/>
-          <a:lstStyle/>
-          <a:p>
-            <a:pPr algn="ctr"/>
-          </a:p>
-        </p:txBody>
-      </p:sp>
-      <p:sp>
-        <p:nvSpPr>
-          <p:cNvPr id="11" name="Isosceles Triangle 10"/>
-          <p:cNvSpPr/>
-          <p:nvPr/>
-        </p:nvSpPr>
-        <p:spPr>
-          <a:xfrm rot="5400000">
-            <a:off x="8546896" y="1673352"/>
-            <a:ext cx="146304" cy="146304"/>
-          </a:xfrm>
-          <a:prstGeom prst="triangle">
-            <a:avLst/>
-          </a:prstGeom>
-          <a:solidFill>
-            <a:srgbClr val="0D9488"/>
-          </a:solidFill>
-          <a:ln>
-            <a:noFill/>
-          </a:ln>
-          <a:effectLst/>
-        </p:spPr>
-        <p:style>
-          <a:lnRef idx="1">
-            <a:schemeClr val="accent1"/>
-          </a:lnRef>
-          <a:fillRef idx="3">
-            <a:schemeClr val="accent1"/>
-          </a:fillRef>
-          <a:effectRef idx="2">
-            <a:schemeClr val="accent1"/>
-          </a:effectRef>
-          <a:fontRef idx="minor">
-            <a:schemeClr val="lt1"/>
-          </a:fontRef>
-        </p:style>
-        <p:txBody>
-          <a:bodyPr rtlCol="0" anchor="ctr"/>
-          <a:lstStyle/>
-          <a:p>
-            <a:pPr algn="ctr"/>
-          </a:p>
-        </p:txBody>
-      </p:sp>
-      <p:sp>
-        <p:nvSpPr>
-          <p:cNvPr id="12" name="Oval 11"/>
-          <p:cNvSpPr/>
-          <p:nvPr/>
-        </p:nvSpPr>
-        <p:spPr>
-          <a:xfrm>
-            <a:off x="2040940" y="1481328"/>
-            <a:ext cx="530352" cy="530352"/>
-          </a:xfrm>
-          <a:prstGeom prst="ellipse">
-            <a:avLst/>
-          </a:prstGeom>
-          <a:solidFill>
-            <a:srgbClr val="0D9488"/>
-          </a:solidFill>
-          <a:ln>
-            <a:noFill/>
-          </a:ln>
-          <a:effectLst/>
-        </p:spPr>
-        <p:style>
-          <a:lnRef idx="1">
-            <a:schemeClr val="accent1"/>
-          </a:lnRef>
-          <a:fillRef idx="3">
-            <a:schemeClr val="accent1"/>
-          </a:fillRef>
-          <a:effectRef idx="2">
-            <a:schemeClr val="accent1"/>
-          </a:effectRef>
-          <a:fontRef idx="minor">
-            <a:schemeClr val="lt1"/>
-          </a:fontRef>
-        </p:style>
-        <p:txBody>
-          <a:bodyPr rtlCol="0" anchor="ctr"/>
-          <a:lstStyle/>
-          <a:p>
-            <a:pPr algn="ctr"/>
-          </a:p>
-        </p:txBody>
-      </p:sp>
-      <p:sp>
-        <p:nvSpPr>
-          <p:cNvPr id="13" name="TextBox 12"/>
+          <p:cNvPr id="10" name="TextBox 9"/>
           <p:cNvSpPr txBox="1"/>
           <p:nvPr/>
         </p:nvSpPr>
@@ -7672,7 +7540,7 @@
       </p:sp>
       <p:sp>
         <p:nvSpPr>
-          <p:cNvPr id="14" name="Rounded Rectangle 13"/>
+          <p:cNvPr id="11" name="Rounded Rectangle 10"/>
           <p:cNvSpPr/>
           <p:nvPr/>
         </p:nvSpPr>
@@ -7720,7 +7588,7 @@
       </p:sp>
       <p:sp>
         <p:nvSpPr>
-          <p:cNvPr id="15" name="TextBox 14"/>
+          <p:cNvPr id="12" name="TextBox 11"/>
           <p:cNvSpPr txBox="1"/>
           <p:nvPr/>
         </p:nvSpPr>
@@ -7755,7 +7623,7 @@
       </p:sp>
       <p:sp>
         <p:nvSpPr>
-          <p:cNvPr id="16" name="TextBox 15"/>
+          <p:cNvPr id="13" name="TextBox 12"/>
           <p:cNvSpPr txBox="1"/>
           <p:nvPr/>
         </p:nvSpPr>
@@ -7794,7 +7662,7 @@
       </p:sp>
       <p:sp>
         <p:nvSpPr>
-          <p:cNvPr id="17" name="Oval 16"/>
+          <p:cNvPr id="14" name="Oval 13"/>
           <p:cNvSpPr/>
           <p:nvPr/>
         </p:nvSpPr>
@@ -7838,7 +7706,7 @@
       </p:sp>
       <p:sp>
         <p:nvSpPr>
-          <p:cNvPr id="18" name="TextBox 17"/>
+          <p:cNvPr id="15" name="TextBox 14"/>
           <p:cNvSpPr txBox="1"/>
           <p:nvPr/>
         </p:nvSpPr>
@@ -7873,7 +7741,7 @@
       </p:sp>
       <p:sp>
         <p:nvSpPr>
-          <p:cNvPr id="19" name="Rounded Rectangle 18"/>
+          <p:cNvPr id="16" name="Rounded Rectangle 15"/>
           <p:cNvSpPr/>
           <p:nvPr/>
         </p:nvSpPr>
@@ -7921,7 +7789,7 @@
       </p:sp>
       <p:sp>
         <p:nvSpPr>
-          <p:cNvPr id="20" name="TextBox 19"/>
+          <p:cNvPr id="17" name="TextBox 16"/>
           <p:cNvSpPr txBox="1"/>
           <p:nvPr/>
         </p:nvSpPr>
@@ -7956,7 +7824,7 @@
       </p:sp>
       <p:sp>
         <p:nvSpPr>
-          <p:cNvPr id="21" name="TextBox 20"/>
+          <p:cNvPr id="18" name="TextBox 17"/>
           <p:cNvSpPr txBox="1"/>
           <p:nvPr/>
         </p:nvSpPr>
@@ -7995,7 +7863,7 @@
       </p:sp>
       <p:sp>
         <p:nvSpPr>
-          <p:cNvPr id="22" name="Oval 21"/>
+          <p:cNvPr id="19" name="Oval 18"/>
           <p:cNvSpPr/>
           <p:nvPr/>
         </p:nvSpPr>
@@ -8039,7 +7907,7 @@
       </p:sp>
       <p:sp>
         <p:nvSpPr>
-          <p:cNvPr id="23" name="TextBox 22"/>
+          <p:cNvPr id="20" name="TextBox 19"/>
           <p:cNvSpPr txBox="1"/>
           <p:nvPr/>
         </p:nvSpPr>
@@ -8074,7 +7942,7 @@
       </p:sp>
       <p:sp>
         <p:nvSpPr>
-          <p:cNvPr id="24" name="Rounded Rectangle 23"/>
+          <p:cNvPr id="21" name="Rounded Rectangle 20"/>
           <p:cNvSpPr/>
           <p:nvPr/>
         </p:nvSpPr>
@@ -8122,7 +7990,7 @@
       </p:sp>
       <p:sp>
         <p:nvSpPr>
-          <p:cNvPr id="25" name="TextBox 24"/>
+          <p:cNvPr id="22" name="TextBox 21"/>
           <p:cNvSpPr txBox="1"/>
           <p:nvPr/>
         </p:nvSpPr>
@@ -8157,7 +8025,7 @@
       </p:sp>
       <p:sp>
         <p:nvSpPr>
-          <p:cNvPr id="26" name="TextBox 25"/>
+          <p:cNvPr id="23" name="TextBox 22"/>
           <p:cNvSpPr txBox="1"/>
           <p:nvPr/>
         </p:nvSpPr>
@@ -8196,7 +8064,7 @@
       </p:sp>
       <p:sp>
         <p:nvSpPr>
-          <p:cNvPr id="27" name="Oval 26"/>
+          <p:cNvPr id="24" name="Oval 23"/>
           <p:cNvSpPr/>
           <p:nvPr/>
         </p:nvSpPr>
@@ -8240,7 +8108,7 @@
       </p:sp>
       <p:sp>
         <p:nvSpPr>
-          <p:cNvPr id="28" name="TextBox 27"/>
+          <p:cNvPr id="25" name="TextBox 24"/>
           <p:cNvSpPr txBox="1"/>
           <p:nvPr/>
         </p:nvSpPr>
@@ -8275,7 +8143,7 @@
       </p:sp>
       <p:sp>
         <p:nvSpPr>
-          <p:cNvPr id="29" name="Rounded Rectangle 28"/>
+          <p:cNvPr id="26" name="Rounded Rectangle 25"/>
           <p:cNvSpPr/>
           <p:nvPr/>
         </p:nvSpPr>
@@ -8323,7 +8191,7 @@
       </p:sp>
       <p:sp>
         <p:nvSpPr>
-          <p:cNvPr id="30" name="TextBox 29"/>
+          <p:cNvPr id="27" name="TextBox 26"/>
           <p:cNvSpPr txBox="1"/>
           <p:nvPr/>
         </p:nvSpPr>
@@ -8358,7 +8226,7 @@
       </p:sp>
       <p:sp>
         <p:nvSpPr>
-          <p:cNvPr id="31" name="TextBox 30"/>
+          <p:cNvPr id="28" name="TextBox 27"/>
           <p:cNvSpPr txBox="1"/>
           <p:nvPr/>
         </p:nvSpPr>
@@ -8397,7 +8265,7 @@
       </p:sp>
       <p:sp>
         <p:nvSpPr>
-          <p:cNvPr id="32" name="TextBox 31"/>
+          <p:cNvPr id="29" name="TextBox 28"/>
           <p:cNvSpPr txBox="1"/>
           <p:nvPr/>
         </p:nvSpPr>
@@ -8432,7 +8300,7 @@
       </p:sp>
       <p:sp>
         <p:nvSpPr>
-          <p:cNvPr id="33" name="TextBox 32"/>
+          <p:cNvPr id="30" name="TextBox 29"/>
           <p:cNvSpPr txBox="1"/>
           <p:nvPr/>
         </p:nvSpPr>
@@ -8467,7 +8335,7 @@
       </p:sp>
       <p:sp>
         <p:nvSpPr>
-          <p:cNvPr id="34" name="Rectangle 33"/>
+          <p:cNvPr id="31" name="Rectangle 30"/>
           <p:cNvSpPr/>
           <p:nvPr/>
         </p:nvSpPr>
@@ -8991,7 +8859,7 @@
           <a:p>
             <a:pPr>
               <a:lnSpc>
-                <a:spcPct val="115000"/>
+                <a:spcPct val="149500"/>
               </a:lnSpc>
             </a:pPr>
             <a:r>
@@ -9016,7 +8884,7 @@
           <a:p>
             <a:pPr>
               <a:lnSpc>
-                <a:spcPct val="115000"/>
+                <a:spcPct val="149500"/>
               </a:lnSpc>
             </a:pPr>
             <a:r>
@@ -9041,7 +8909,7 @@
           <a:p>
             <a:pPr>
               <a:lnSpc>
-                <a:spcPct val="115000"/>
+                <a:spcPct val="149500"/>
               </a:lnSpc>
             </a:pPr>
             <a:r>
@@ -9775,7 +9643,7 @@
           <a:p>
             <a:pPr>
               <a:lnSpc>
-                <a:spcPct val="115000"/>
+                <a:spcPct val="149500"/>
               </a:lnSpc>
             </a:pPr>
             <a:r>
@@ -9800,7 +9668,7 @@
           <a:p>
             <a:pPr>
               <a:lnSpc>
-                <a:spcPct val="115000"/>
+                <a:spcPct val="149500"/>
               </a:lnSpc>
             </a:pPr>
             <a:r>
@@ -9825,7 +9693,7 @@
           <a:p>
             <a:pPr>
               <a:lnSpc>
-                <a:spcPct val="115000"/>
+                <a:spcPct val="149500"/>
               </a:lnSpc>
             </a:pPr>
             <a:r>
@@ -10488,7 +10356,7 @@
           <a:p>
             <a:pPr>
               <a:lnSpc>
-                <a:spcPct val="115000"/>
+                <a:spcPct val="149500"/>
               </a:lnSpc>
             </a:pPr>
             <a:r>
@@ -10513,7 +10381,7 @@
           <a:p>
             <a:pPr>
               <a:lnSpc>
-                <a:spcPct val="115000"/>
+                <a:spcPct val="149500"/>
               </a:lnSpc>
             </a:pPr>
             <a:r>
@@ -10538,7 +10406,7 @@
           <a:p>
             <a:pPr>
               <a:lnSpc>
-                <a:spcPct val="115000"/>
+                <a:spcPct val="149500"/>
               </a:lnSpc>
             </a:pPr>
             <a:r>
@@ -10929,7 +10797,7 @@
           <a:p>
             <a:pPr>
               <a:lnSpc>
-                <a:spcPct val="115000"/>
+                <a:spcPct val="149500"/>
               </a:lnSpc>
             </a:pPr>
             <a:r>
@@ -10954,7 +10822,7 @@
           <a:p>
             <a:pPr>
               <a:lnSpc>
-                <a:spcPct val="115000"/>
+                <a:spcPct val="149500"/>
               </a:lnSpc>
             </a:pPr>
             <a:r>
@@ -10979,7 +10847,7 @@
           <a:p>
             <a:pPr>
               <a:lnSpc>
-                <a:spcPct val="115000"/>
+                <a:spcPct val="149500"/>
               </a:lnSpc>
             </a:pPr>
             <a:r>

--- a/class/cloud_infra_mgmt/09주차_Terraform_IaC기초/01_강의자료/3차시_destroy와State파일.pptx
+++ b/class/cloud_infra_mgmt/09주차_Terraform_IaC기초/01_강의자료/3차시_destroy와State파일.pptx
@@ -4985,6 +4985,8 @@
                   <a:srgbClr val="14B8A6"/>
                 </a:solidFill>
                 <a:latin typeface="맑은 고딕"/>
+                <a:ea typeface="맑은 고딕"/>
+                <a:cs typeface="맑은 고딕"/>
               </a:rPr>
               <a:t>클라우드인프라관리  ·  9주차 3차시</a:t>
             </a:r>
@@ -5020,6 +5022,8 @@
                   <a:srgbClr val="FFFFFF"/>
                 </a:solidFill>
                 <a:latin typeface="맑은 고딕"/>
+                <a:ea typeface="맑은 고딕"/>
+                <a:cs typeface="맑은 고딕"/>
               </a:rPr>
               <a:t>destroy와 State 파일</a:t>
             </a:r>
@@ -5055,6 +5059,8 @@
                   <a:srgbClr val="C9D3E6"/>
                 </a:solidFill>
                 <a:latin typeface="맑은 고딕"/>
+                <a:ea typeface="맑은 고딕"/>
+                <a:cs typeface="맑은 고딕"/>
               </a:rPr>
               <a:t>Terraform은 인프라 상태를 어떻게 기억할까</a:t>
             </a:r>
@@ -5090,6 +5096,8 @@
                   <a:srgbClr val="FFFFFF"/>
                 </a:solidFill>
                 <a:latin typeface="맑은 고딕"/>
+                <a:ea typeface="맑은 고딕"/>
+                <a:cs typeface="맑은 고딕"/>
               </a:rPr>
               <a:t>영남이공대학교 김지윤교수</a:t>
             </a:r>
@@ -5249,6 +5257,8 @@
                   <a:srgbClr val="14213D"/>
                 </a:solidFill>
                 <a:latin typeface="맑은 고딕"/>
+                <a:ea typeface="맑은 고딕"/>
+                <a:cs typeface="맑은 고딕"/>
               </a:rPr>
               <a:t>03</a:t>
             </a:r>
@@ -5284,6 +5294,8 @@
                   <a:srgbClr val="14B8A6"/>
                 </a:solidFill>
                 <a:latin typeface="맑은 고딕"/>
+                <a:ea typeface="맑은 고딕"/>
+                <a:cs typeface="맑은 고딕"/>
               </a:rPr>
               <a:t>실습 안내</a:t>
             </a:r>
@@ -5319,6 +5331,8 @@
                   <a:srgbClr val="FFFFFF"/>
                 </a:solidFill>
                 <a:latin typeface="맑은 고딕"/>
+                <a:ea typeface="맑은 고딕"/>
+                <a:cs typeface="맑은 고딕"/>
               </a:rPr>
               <a:t>Killercoda — destroy + State 파일 확인</a:t>
             </a:r>
@@ -5358,6 +5372,8 @@
                   <a:srgbClr val="0D9488"/>
                 </a:solidFill>
                 <a:latin typeface="맑은 고딕"/>
+                <a:ea typeface="맑은 고딕"/>
+                <a:cs typeface="맑은 고딕"/>
               </a:rPr>
               <a:t>●  </a:t>
             </a:r>
@@ -5367,6 +5383,8 @@
                   <a:srgbClr val="222733"/>
                 </a:solidFill>
                 <a:latin typeface="맑은 고딕"/>
+                <a:ea typeface="맑은 고딕"/>
+                <a:cs typeface="맑은 고딕"/>
               </a:rPr>
               <a:t>직전 실습에서 만든 리소스에 terraform destroy 실행</a:t>
             </a:r>
@@ -5383,6 +5401,8 @@
                   <a:srgbClr val="0D9488"/>
                 </a:solidFill>
                 <a:latin typeface="맑은 고딕"/>
+                <a:ea typeface="맑은 고딕"/>
+                <a:cs typeface="맑은 고딕"/>
               </a:rPr>
               <a:t>●  </a:t>
             </a:r>
@@ -5392,6 +5412,8 @@
                   <a:srgbClr val="222733"/>
                 </a:solidFill>
                 <a:latin typeface="맑은 고딕"/>
+                <a:ea typeface="맑은 고딕"/>
+                <a:cs typeface="맑은 고딕"/>
               </a:rPr>
               <a:t>destroy 전, cat terraform.tfstate(또는 terraform show)로 State 내용 직접 열람</a:t>
             </a:r>
@@ -5408,6 +5430,8 @@
                   <a:srgbClr val="0D9488"/>
                 </a:solidFill>
                 <a:latin typeface="맑은 고딕"/>
+                <a:ea typeface="맑은 고딕"/>
+                <a:cs typeface="맑은 고딕"/>
               </a:rPr>
               <a:t>●  </a:t>
             </a:r>
@@ -5417,6 +5441,8 @@
                   <a:srgbClr val="222733"/>
                 </a:solidFill>
                 <a:latin typeface="맑은 고딕"/>
+                <a:ea typeface="맑은 고딕"/>
+                <a:cs typeface="맑은 고딕"/>
               </a:rPr>
               <a:t>destroy 후 다시 State를 확인해 리소스 기록이 사라졌는지 비교</a:t>
             </a:r>
@@ -5452,6 +5478,8 @@
                   <a:srgbClr val="5B6373"/>
                 </a:solidFill>
                 <a:latin typeface="맑은 고딕"/>
+                <a:ea typeface="맑은 고딕"/>
+                <a:cs typeface="맑은 고딕"/>
               </a:rPr>
               <a:t>클라우드인프라관리  ·  9주차 3차시</a:t>
             </a:r>
@@ -5487,6 +5515,8 @@
                   <a:srgbClr val="5B6373"/>
                 </a:solidFill>
                 <a:latin typeface="맑은 고딕"/>
+                <a:ea typeface="맑은 고딕"/>
+                <a:cs typeface="맑은 고딕"/>
               </a:rPr>
               <a:t>10 / 13</a:t>
             </a:r>
@@ -5690,6 +5720,8 @@
                   <a:srgbClr val="14213D"/>
                 </a:solidFill>
                 <a:latin typeface="맑은 고딕"/>
+                <a:ea typeface="맑은 고딕"/>
+                <a:cs typeface="맑은 고딕"/>
               </a:rPr>
               <a:t>03</a:t>
             </a:r>
@@ -5725,6 +5757,8 @@
                   <a:srgbClr val="14B8A6"/>
                 </a:solidFill>
                 <a:latin typeface="맑은 고딕"/>
+                <a:ea typeface="맑은 고딕"/>
+                <a:cs typeface="맑은 고딕"/>
               </a:rPr>
               <a:t>실습 안내</a:t>
             </a:r>
@@ -5760,6 +5794,8 @@
                   <a:srgbClr val="FFFFFF"/>
                 </a:solidFill>
                 <a:latin typeface="맑은 고딕"/>
+                <a:ea typeface="맑은 고딕"/>
+                <a:cs typeface="맑은 고딕"/>
               </a:rPr>
               <a:t>VM 안내 — 9주차 종합 제출</a:t>
             </a:r>
@@ -5799,6 +5835,8 @@
                   <a:srgbClr val="0D9488"/>
                 </a:solidFill>
                 <a:latin typeface="맑은 고딕"/>
+                <a:ea typeface="맑은 고딕"/>
+                <a:cs typeface="맑은 고딕"/>
               </a:rPr>
               <a:t>●  </a:t>
             </a:r>
@@ -5808,6 +5846,8 @@
                   <a:srgbClr val="222733"/>
                 </a:solidFill>
                 <a:latin typeface="맑은 고딕"/>
+                <a:ea typeface="맑은 고딕"/>
+                <a:cs typeface="맑은 고딕"/>
               </a:rPr>
               <a:t>2차시에 만든 tf-nginx 컨테이너에 terraform destroy -auto-approve 실행</a:t>
             </a:r>
@@ -5824,6 +5864,8 @@
                   <a:srgbClr val="0D9488"/>
                 </a:solidFill>
                 <a:latin typeface="맑은 고딕"/>
+                <a:ea typeface="맑은 고딕"/>
+                <a:cs typeface="맑은 고딕"/>
               </a:rPr>
               <a:t>●  </a:t>
             </a:r>
@@ -5833,6 +5875,8 @@
                   <a:srgbClr val="222733"/>
                 </a:solidFill>
                 <a:latin typeface="맑은 고딕"/>
+                <a:ea typeface="맑은 고딕"/>
+                <a:cs typeface="맑은 고딕"/>
               </a:rPr>
               <a:t>docker ps로 컨테이너가 사라진 것 확인 — 캡처 첨부</a:t>
             </a:r>
@@ -5849,6 +5893,8 @@
                   <a:srgbClr val="0D9488"/>
                 </a:solidFill>
                 <a:latin typeface="맑은 고딕"/>
+                <a:ea typeface="맑은 고딕"/>
+                <a:cs typeface="맑은 고딕"/>
               </a:rPr>
               <a:t>●  </a:t>
             </a:r>
@@ -5858,6 +5904,8 @@
                   <a:srgbClr val="222733"/>
                 </a:solidFill>
                 <a:latin typeface="맑은 고딕"/>
+                <a:ea typeface="맑은 고딕"/>
+                <a:cs typeface="맑은 고딕"/>
               </a:rPr>
               <a:t>cat terraform.tfstate(또는 terraform show)로 State 파일 내용 확인 — 캡처 첨부</a:t>
             </a:r>
@@ -5874,6 +5922,8 @@
                   <a:srgbClr val="0D9488"/>
                 </a:solidFill>
                 <a:latin typeface="맑은 고딕"/>
+                <a:ea typeface="맑은 고딕"/>
+                <a:cs typeface="맑은 고딕"/>
               </a:rPr>
               <a:t>●  </a:t>
             </a:r>
@@ -5883,6 +5933,8 @@
                   <a:srgbClr val="222733"/>
                 </a:solidFill>
                 <a:latin typeface="맑은 고딕"/>
+                <a:ea typeface="맑은 고딕"/>
+                <a:cs typeface="맑은 고딕"/>
               </a:rPr>
               <a:t>9주차 1~3차시(설치·배포·destroy) 실습 결과를 종합해서 제출</a:t>
             </a:r>
@@ -5918,6 +5970,8 @@
                   <a:srgbClr val="5B6373"/>
                 </a:solidFill>
                 <a:latin typeface="맑은 고딕"/>
+                <a:ea typeface="맑은 고딕"/>
+                <a:cs typeface="맑은 고딕"/>
               </a:rPr>
               <a:t>클라우드인프라관리  ·  9주차 3차시</a:t>
             </a:r>
@@ -5953,6 +6007,8 @@
                   <a:srgbClr val="5B6373"/>
                 </a:solidFill>
                 <a:latin typeface="맑은 고딕"/>
+                <a:ea typeface="맑은 고딕"/>
+                <a:cs typeface="맑은 고딕"/>
               </a:rPr>
               <a:t>11 / 13</a:t>
             </a:r>
@@ -6138,6 +6194,8 @@
                   <a:srgbClr val="FFFFFF"/>
                 </a:solidFill>
                 <a:latin typeface="맑은 고딕"/>
+                <a:ea typeface="맑은 고딕"/>
+                <a:cs typeface="맑은 고딕"/>
               </a:rPr>
               <a:t>오늘의 정리</a:t>
             </a:r>
@@ -6191,6 +6249,8 @@
                   <a:srgbClr val="14213D"/>
                 </a:solidFill>
                 <a:latin typeface="맑은 고딕"/>
+                <a:ea typeface="맑은 고딕"/>
+                <a:cs typeface="맑은 고딕"/>
               </a:rPr>
               <a:t>1</a:t>
             </a:r>
@@ -6226,6 +6286,8 @@
                   <a:srgbClr val="FFFFFF"/>
                 </a:solidFill>
                 <a:latin typeface="맑은 고딕"/>
+                <a:ea typeface="맑은 고딕"/>
+                <a:cs typeface="맑은 고딕"/>
               </a:rPr>
               <a:t>terraform destroy는 코드로 만든 인프라를 코드로 깔끔하게 제거한다</a:t>
             </a:r>
@@ -6279,6 +6341,8 @@
                   <a:srgbClr val="14213D"/>
                 </a:solidFill>
                 <a:latin typeface="맑은 고딕"/>
+                <a:ea typeface="맑은 고딕"/>
+                <a:cs typeface="맑은 고딕"/>
               </a:rPr>
               <a:t>2</a:t>
             </a:r>
@@ -6314,6 +6378,8 @@
                   <a:srgbClr val="FFFFFF"/>
                 </a:solidFill>
                 <a:latin typeface="맑은 고딕"/>
+                <a:ea typeface="맑은 고딕"/>
+                <a:cs typeface="맑은 고딕"/>
               </a:rPr>
               <a:t>State 파일(terraform.tfstate)은 Terraform이 현재 인프라 상태를 기억하는 기록이다</a:t>
             </a:r>
@@ -6455,6 +6521,8 @@
                   <a:srgbClr val="FFFFFF"/>
                 </a:solidFill>
                 <a:latin typeface="맑은 고딕"/>
+                <a:ea typeface="맑은 고딕"/>
+                <a:cs typeface="맑은 고딕"/>
               </a:rPr>
               <a:t>다음 주 예고</a:t>
             </a:r>
@@ -6490,6 +6558,8 @@
                   <a:srgbClr val="14B8A6"/>
                 </a:solidFill>
                 <a:latin typeface="맑은 고딕"/>
+                <a:ea typeface="맑은 고딕"/>
+                <a:cs typeface="맑은 고딕"/>
               </a:rPr>
               <a:t>다음 차시 예고 — 10주차 — Terraform Cloud와 원격 State 관리</a:t>
             </a:r>
@@ -6525,6 +6595,8 @@
                   <a:srgbClr val="FFFFFF"/>
                 </a:solidFill>
                 <a:latin typeface="맑은 고딕"/>
+                <a:ea typeface="맑은 고딕"/>
+                <a:cs typeface="맑은 고딕"/>
               </a:rPr>
               <a:t>로컬에만 있던 State 파일을 Terraform Cloud로 옮겨, 여러 사람이 안전하게 협업할 수 있는 원격 실행 환경을 구축합니다.</a:t>
             </a:r>
@@ -6710,6 +6782,8 @@
                   <a:srgbClr val="14B8A6"/>
                 </a:solidFill>
                 <a:latin typeface="맑은 고딕"/>
+                <a:ea typeface="맑은 고딕"/>
+                <a:cs typeface="맑은 고딕"/>
               </a:rPr>
               <a:t>9주차를 마치며</a:t>
             </a:r>
@@ -6745,6 +6819,8 @@
                   <a:srgbClr val="FFFFFF"/>
                 </a:solidFill>
                 <a:latin typeface="맑은 고딕"/>
+                <a:ea typeface="맑은 고딕"/>
+                <a:cs typeface="맑은 고딕"/>
               </a:rPr>
               <a:t>수고하셨습니다!</a:t>
             </a:r>
@@ -6784,6 +6860,8 @@
                   <a:srgbClr val="C9D3E6"/>
                 </a:solidFill>
                 <a:latin typeface="맑은 고딕"/>
+                <a:ea typeface="맑은 고딕"/>
+                <a:cs typeface="맑은 고딕"/>
               </a:rPr>
               <a:t>인프라를 코드로 다루는 첫 경험, Terraform의 기본기를 잘 다지셨습니다.</a:t>
             </a:r>
@@ -6925,6 +7003,8 @@
                   <a:srgbClr val="14B8A6"/>
                 </a:solidFill>
                 <a:latin typeface="맑은 고딕"/>
+                <a:ea typeface="맑은 고딕"/>
+                <a:cs typeface="맑은 고딕"/>
               </a:rPr>
               <a:t>SESSION OVERVIEW</a:t>
             </a:r>
@@ -6960,6 +7040,8 @@
                   <a:srgbClr val="FFFFFF"/>
                 </a:solidFill>
                 <a:latin typeface="맑은 고딕"/>
+                <a:ea typeface="맑은 고딕"/>
+                <a:cs typeface="맑은 고딕"/>
               </a:rPr>
               <a:t>오늘의 학습 목표</a:t>
             </a:r>
@@ -6999,6 +7081,8 @@
                   <a:srgbClr val="222733"/>
                 </a:solidFill>
                 <a:latin typeface="맑은 고딕"/>
+                <a:ea typeface="맑은 고딕"/>
+                <a:cs typeface="맑은 고딕"/>
               </a:rPr>
               <a:t>1.  terraform destroy로 코드로 만든 인프라를 코드로 제거한다</a:t>
             </a:r>
@@ -7015,6 +7099,8 @@
                   <a:srgbClr val="222733"/>
                 </a:solidFill>
                 <a:latin typeface="맑은 고딕"/>
+                <a:ea typeface="맑은 고딕"/>
+                <a:cs typeface="맑은 고딕"/>
               </a:rPr>
               <a:t>2.  State 파일이 무엇이고 왜 필요한지 이해한다</a:t>
             </a:r>
@@ -7031,6 +7117,8 @@
                   <a:srgbClr val="222733"/>
                 </a:solidFill>
                 <a:latin typeface="맑은 고딕"/>
+                <a:ea typeface="맑은 고딕"/>
+                <a:cs typeface="맑은 고딕"/>
               </a:rPr>
               <a:t>3.  State 파일을 로컬에 두었을 때의 한계를 이해한다(10주 예고)</a:t>
             </a:r>
@@ -7066,6 +7154,8 @@
                   <a:srgbClr val="5B6373"/>
                 </a:solidFill>
                 <a:latin typeface="맑은 고딕"/>
+                <a:ea typeface="맑은 고딕"/>
+                <a:cs typeface="맑은 고딕"/>
               </a:rPr>
               <a:t>클라우드인프라관리  ·  9주차 3차시</a:t>
             </a:r>
@@ -7101,6 +7191,8 @@
                   <a:srgbClr val="5B6373"/>
                 </a:solidFill>
                 <a:latin typeface="맑은 고딕"/>
+                <a:ea typeface="맑은 고딕"/>
+                <a:cs typeface="맑은 고딕"/>
               </a:rPr>
               <a:t>02 / 13</a:t>
             </a:r>
@@ -7286,6 +7378,8 @@
                   <a:srgbClr val="14B8A6"/>
                 </a:solidFill>
                 <a:latin typeface="맑은 고딕"/>
+                <a:ea typeface="맑은 고딕"/>
+                <a:cs typeface="맑은 고딕"/>
               </a:rPr>
               <a:t>SESSION OVERVIEW</a:t>
             </a:r>
@@ -7321,6 +7415,8 @@
                   <a:srgbClr val="FFFFFF"/>
                 </a:solidFill>
                 <a:latin typeface="맑은 고딕"/>
+                <a:ea typeface="맑은 고딕"/>
+                <a:cs typeface="맑은 고딕"/>
               </a:rPr>
               <a:t>오늘의 진행 순서</a:t>
             </a:r>
@@ -7532,6 +7628,8 @@
                   <a:srgbClr val="FFFFFF"/>
                 </a:solidFill>
                 <a:latin typeface="맑은 고딕"/>
+                <a:ea typeface="맑은 고딕"/>
+                <a:cs typeface="맑은 고딕"/>
               </a:rPr>
               <a:t>1</a:t>
             </a:r>
@@ -7615,6 +7713,8 @@
                   <a:srgbClr val="14213D"/>
                 </a:solidFill>
                 <a:latin typeface="맑은 고딕"/>
+                <a:ea typeface="맑은 고딕"/>
+                <a:cs typeface="맑은 고딕"/>
               </a:rPr>
               <a:t>개념 설명</a:t>
             </a:r>
@@ -7654,6 +7754,8 @@
                   <a:srgbClr val="222733"/>
                 </a:solidFill>
                 <a:latin typeface="맑은 고딕"/>
+                <a:ea typeface="맑은 고딕"/>
+                <a:cs typeface="맑은 고딕"/>
               </a:rPr>
               <a:t>강의자료 기반 직접 강의</a:t>
             </a:r>
@@ -7733,6 +7835,8 @@
                   <a:srgbClr val="FFFFFF"/>
                 </a:solidFill>
                 <a:latin typeface="맑은 고딕"/>
+                <a:ea typeface="맑은 고딕"/>
+                <a:cs typeface="맑은 고딕"/>
               </a:rPr>
               <a:t>2</a:t>
             </a:r>
@@ -7816,6 +7920,8 @@
                   <a:srgbClr val="14213D"/>
                 </a:solidFill>
                 <a:latin typeface="맑은 고딕"/>
+                <a:ea typeface="맑은 고딕"/>
+                <a:cs typeface="맑은 고딕"/>
               </a:rPr>
               <a:t>Killercoda</a:t>
             </a:r>
@@ -7855,6 +7961,8 @@
                   <a:srgbClr val="222733"/>
                 </a:solidFill>
                 <a:latin typeface="맑은 고딕"/>
+                <a:ea typeface="맑은 고딕"/>
+                <a:cs typeface="맑은 고딕"/>
               </a:rPr>
               <a:t>destroy+State 파일 확인</a:t>
             </a:r>
@@ -7934,6 +8042,8 @@
                   <a:srgbClr val="FFFFFF"/>
                 </a:solidFill>
                 <a:latin typeface="맑은 고딕"/>
+                <a:ea typeface="맑은 고딕"/>
+                <a:cs typeface="맑은 고딕"/>
               </a:rPr>
               <a:t>3</a:t>
             </a:r>
@@ -8017,6 +8127,8 @@
                   <a:srgbClr val="14213D"/>
                 </a:solidFill>
                 <a:latin typeface="맑은 고딕"/>
+                <a:ea typeface="맑은 고딕"/>
+                <a:cs typeface="맑은 고딕"/>
               </a:rPr>
               <a:t>VM 안내</a:t>
             </a:r>
@@ -8056,6 +8168,8 @@
                   <a:srgbClr val="222733"/>
                 </a:solidFill>
                 <a:latin typeface="맑은 고딕"/>
+                <a:ea typeface="맑은 고딕"/>
+                <a:cs typeface="맑은 고딕"/>
               </a:rPr>
               <a:t>VM에서 동일 실습</a:t>
             </a:r>
@@ -8135,6 +8249,8 @@
                   <a:srgbClr val="FFFFFF"/>
                 </a:solidFill>
                 <a:latin typeface="맑은 고딕"/>
+                <a:ea typeface="맑은 고딕"/>
+                <a:cs typeface="맑은 고딕"/>
               </a:rPr>
               <a:t>4</a:t>
             </a:r>
@@ -8218,6 +8334,8 @@
                   <a:srgbClr val="14213D"/>
                 </a:solidFill>
                 <a:latin typeface="맑은 고딕"/>
+                <a:ea typeface="맑은 고딕"/>
+                <a:cs typeface="맑은 고딕"/>
               </a:rPr>
               <a:t>결과 제출</a:t>
             </a:r>
@@ -8257,6 +8375,8 @@
                   <a:srgbClr val="222733"/>
                 </a:solidFill>
                 <a:latin typeface="맑은 고딕"/>
+                <a:ea typeface="맑은 고딕"/>
+                <a:cs typeface="맑은 고딕"/>
               </a:rPr>
               <a:t>9주차 종합 제출</a:t>
             </a:r>
@@ -8292,6 +8412,8 @@
                   <a:srgbClr val="5B6373"/>
                 </a:solidFill>
                 <a:latin typeface="맑은 고딕"/>
+                <a:ea typeface="맑은 고딕"/>
+                <a:cs typeface="맑은 고딕"/>
               </a:rPr>
               <a:t>클라우드인프라관리  ·  9주차 3차시</a:t>
             </a:r>
@@ -8327,6 +8449,8 @@
                   <a:srgbClr val="5B6373"/>
                 </a:solidFill>
                 <a:latin typeface="맑은 고딕"/>
+                <a:ea typeface="맑은 고딕"/>
+                <a:cs typeface="맑은 고딕"/>
               </a:rPr>
               <a:t>03 / 13</a:t>
             </a:r>
@@ -8530,6 +8654,8 @@
                   <a:srgbClr val="14213D"/>
                 </a:solidFill>
                 <a:latin typeface="맑은 고딕"/>
+                <a:ea typeface="맑은 고딕"/>
+                <a:cs typeface="맑은 고딕"/>
               </a:rPr>
               <a:t>PART 01</a:t>
             </a:r>
@@ -8565,6 +8691,8 @@
                   <a:srgbClr val="FFFFFF"/>
                 </a:solidFill>
                 <a:latin typeface="맑은 고딕"/>
+                <a:ea typeface="맑은 고딕"/>
+                <a:cs typeface="맑은 고딕"/>
               </a:rPr>
               <a:t>terraform destroy</a:t>
             </a:r>
@@ -8600,6 +8728,8 @@
                   <a:srgbClr val="C9D3E6"/>
                 </a:solidFill>
                 <a:latin typeface="맑은 고딕"/>
+                <a:ea typeface="맑은 고딕"/>
+                <a:cs typeface="맑은 고딕"/>
               </a:rPr>
               <a:t>코드로 만든 것은 코드로 지운다</a:t>
             </a:r>
@@ -8759,6 +8889,8 @@
                   <a:srgbClr val="14213D"/>
                 </a:solidFill>
                 <a:latin typeface="맑은 고딕"/>
+                <a:ea typeface="맑은 고딕"/>
+                <a:cs typeface="맑은 고딕"/>
               </a:rPr>
               <a:t>01</a:t>
             </a:r>
@@ -8794,6 +8926,8 @@
                   <a:srgbClr val="14B8A6"/>
                 </a:solidFill>
                 <a:latin typeface="맑은 고딕"/>
+                <a:ea typeface="맑은 고딕"/>
+                <a:cs typeface="맑은 고딕"/>
               </a:rPr>
               <a:t>PART 1 · destroy</a:t>
             </a:r>
@@ -8829,6 +8963,8 @@
                   <a:srgbClr val="FFFFFF"/>
                 </a:solidFill>
                 <a:latin typeface="맑은 고딕"/>
+                <a:ea typeface="맑은 고딕"/>
+                <a:cs typeface="맑은 고딕"/>
               </a:rPr>
               <a:t>만들 때도 코드, 지울 때도 코드</a:t>
             </a:r>
@@ -8868,6 +9004,8 @@
                   <a:srgbClr val="0D9488"/>
                 </a:solidFill>
                 <a:latin typeface="맑은 고딕"/>
+                <a:ea typeface="맑은 고딕"/>
+                <a:cs typeface="맑은 고딕"/>
               </a:rPr>
               <a:t>●  </a:t>
             </a:r>
@@ -8877,6 +9015,8 @@
                   <a:srgbClr val="222733"/>
                 </a:solidFill>
                 <a:latin typeface="맑은 고딕"/>
+                <a:ea typeface="맑은 고딕"/>
+                <a:cs typeface="맑은 고딕"/>
               </a:rPr>
               <a:t>2주차에서 컨테이너를 지울 땐 docker rm을 손으로 실행했음</a:t>
             </a:r>
@@ -8893,6 +9033,8 @@
                   <a:srgbClr val="0D9488"/>
                 </a:solidFill>
                 <a:latin typeface="맑은 고딕"/>
+                <a:ea typeface="맑은 고딕"/>
+                <a:cs typeface="맑은 고딕"/>
               </a:rPr>
               <a:t>●  </a:t>
             </a:r>
@@ -8902,6 +9044,8 @@
                   <a:srgbClr val="222733"/>
                 </a:solidFill>
                 <a:latin typeface="맑은 고딕"/>
+                <a:ea typeface="맑은 고딕"/>
+                <a:cs typeface="맑은 고딕"/>
               </a:rPr>
               <a:t>Terraform으로 만든 리소스는 terraform destroy 한 번으로 코드에 선언된 것들을 전부 제거</a:t>
             </a:r>
@@ -8918,6 +9062,8 @@
                   <a:srgbClr val="0D9488"/>
                 </a:solidFill>
                 <a:latin typeface="맑은 고딕"/>
+                <a:ea typeface="맑은 고딕"/>
+                <a:cs typeface="맑은 고딕"/>
               </a:rPr>
               <a:t>●  </a:t>
             </a:r>
@@ -8927,6 +9073,8 @@
                   <a:srgbClr val="222733"/>
                 </a:solidFill>
                 <a:latin typeface="맑은 고딕"/>
+                <a:ea typeface="맑은 고딕"/>
+                <a:cs typeface="맑은 고딕"/>
               </a:rPr>
               <a:t>destroy도 apply처럼 먼저 '무엇을 지울지' 보여주고 확인을 거침(-auto-approve로 생략 가능)</a:t>
             </a:r>
@@ -9006,6 +9154,8 @@
                   <a:srgbClr val="FFFFFF"/>
                 </a:solidFill>
                 <a:latin typeface="맑은 고딕"/>
+                <a:ea typeface="맑은 고딕"/>
+                <a:cs typeface="맑은 고딕"/>
               </a:rPr>
               <a:t>🎯  오늘 지울 것</a:t>
             </a:r>
@@ -9041,6 +9191,8 @@
                   <a:srgbClr val="FFFFFF"/>
                 </a:solidFill>
                 <a:latin typeface="맑은 고딕"/>
+                <a:ea typeface="맑은 고딕"/>
+                <a:cs typeface="맑은 고딕"/>
               </a:rPr>
               <a:t>2차시에 만든 tf-nginx 컨테이너를 terraform destroy로 제거해봅니다</a:t>
             </a:r>
@@ -9076,6 +9228,8 @@
                   <a:srgbClr val="5B6373"/>
                 </a:solidFill>
                 <a:latin typeface="맑은 고딕"/>
+                <a:ea typeface="맑은 고딕"/>
+                <a:cs typeface="맑은 고딕"/>
               </a:rPr>
               <a:t>클라우드인프라관리  ·  9주차 3차시</a:t>
             </a:r>
@@ -9111,6 +9265,8 @@
                   <a:srgbClr val="5B6373"/>
                 </a:solidFill>
                 <a:latin typeface="맑은 고딕"/>
+                <a:ea typeface="맑은 고딕"/>
+                <a:cs typeface="맑은 고딕"/>
               </a:rPr>
               <a:t>05 / 13</a:t>
             </a:r>
@@ -9314,6 +9470,8 @@
                   <a:srgbClr val="14213D"/>
                 </a:solidFill>
                 <a:latin typeface="맑은 고딕"/>
+                <a:ea typeface="맑은 고딕"/>
+                <a:cs typeface="맑은 고딕"/>
               </a:rPr>
               <a:t>PART 02</a:t>
             </a:r>
@@ -9349,6 +9507,8 @@
                   <a:srgbClr val="FFFFFF"/>
                 </a:solidFill>
                 <a:latin typeface="맑은 고딕"/>
+                <a:ea typeface="맑은 고딕"/>
+                <a:cs typeface="맑은 고딕"/>
               </a:rPr>
               <a:t>State 파일이란?</a:t>
             </a:r>
@@ -9384,6 +9544,8 @@
                   <a:srgbClr val="C9D3E6"/>
                 </a:solidFill>
                 <a:latin typeface="맑은 고딕"/>
+                <a:ea typeface="맑은 고딕"/>
+                <a:cs typeface="맑은 고딕"/>
               </a:rPr>
               <a:t>Terraform의 '기억 장치'</a:t>
             </a:r>
@@ -9543,6 +9705,8 @@
                   <a:srgbClr val="14213D"/>
                 </a:solidFill>
                 <a:latin typeface="맑은 고딕"/>
+                <a:ea typeface="맑은 고딕"/>
+                <a:cs typeface="맑은 고딕"/>
               </a:rPr>
               <a:t>02</a:t>
             </a:r>
@@ -9578,6 +9742,8 @@
                   <a:srgbClr val="14B8A6"/>
                 </a:solidFill>
                 <a:latin typeface="맑은 고딕"/>
+                <a:ea typeface="맑은 고딕"/>
+                <a:cs typeface="맑은 고딕"/>
               </a:rPr>
               <a:t>PART 2 · State 파일</a:t>
             </a:r>
@@ -9613,6 +9779,8 @@
                   <a:srgbClr val="FFFFFF"/>
                 </a:solidFill>
                 <a:latin typeface="맑은 고딕"/>
+                <a:ea typeface="맑은 고딕"/>
+                <a:cs typeface="맑은 고딕"/>
               </a:rPr>
               <a:t>Terraform이 상태를 기억하는 방법</a:t>
             </a:r>
@@ -9652,6 +9820,8 @@
                   <a:srgbClr val="0D9488"/>
                 </a:solidFill>
                 <a:latin typeface="맑은 고딕"/>
+                <a:ea typeface="맑은 고딕"/>
+                <a:cs typeface="맑은 고딕"/>
               </a:rPr>
               <a:t>●  </a:t>
             </a:r>
@@ -9661,6 +9831,8 @@
                   <a:srgbClr val="222733"/>
                 </a:solidFill>
                 <a:latin typeface="맑은 고딕"/>
+                <a:ea typeface="맑은 고딕"/>
+                <a:cs typeface="맑은 고딕"/>
               </a:rPr>
               <a:t>terraform apply를 실행하면 terraform.tfstate라는 파일이 자동으로 생성됨</a:t>
             </a:r>
@@ -9677,6 +9849,8 @@
                   <a:srgbClr val="0D9488"/>
                 </a:solidFill>
                 <a:latin typeface="맑은 고딕"/>
+                <a:ea typeface="맑은 고딕"/>
+                <a:cs typeface="맑은 고딕"/>
               </a:rPr>
               <a:t>●  </a:t>
             </a:r>
@@ -9686,6 +9860,8 @@
                   <a:srgbClr val="222733"/>
                 </a:solidFill>
                 <a:latin typeface="맑은 고딕"/>
+                <a:ea typeface="맑은 고딕"/>
+                <a:cs typeface="맑은 고딕"/>
               </a:rPr>
               <a:t>이 파일에 '내가 지금 무엇을 만들었는지'가 기록됨(리소스 ID, 속성값 등)</a:t>
             </a:r>
@@ -9702,6 +9878,8 @@
                   <a:srgbClr val="0D9488"/>
                 </a:solidFill>
                 <a:latin typeface="맑은 고딕"/>
+                <a:ea typeface="맑은 고딕"/>
+                <a:cs typeface="맑은 고딕"/>
               </a:rPr>
               <a:t>●  </a:t>
             </a:r>
@@ -9711,6 +9889,8 @@
                   <a:srgbClr val="222733"/>
                 </a:solidFill>
                 <a:latin typeface="맑은 고딕"/>
+                <a:ea typeface="맑은 고딕"/>
+                <a:cs typeface="맑은 고딕"/>
               </a:rPr>
               <a:t>다음에 plan/apply를 실행할 때, 이 State와 코드를 비교해서 무엇이 바뀌었는지 판단</a:t>
             </a:r>
@@ -9746,6 +9926,8 @@
                   <a:srgbClr val="14213D"/>
                 </a:solidFill>
                 <a:latin typeface="맑은 고딕"/>
+                <a:ea typeface="맑은 고딕"/>
+                <a:cs typeface="맑은 고딕"/>
               </a:rPr>
               <a:t>State의 역할</a:t>
             </a:r>
@@ -9825,6 +10007,8 @@
                   <a:srgbClr val="FFFFFF"/>
                 </a:solidFill>
                 <a:latin typeface="맑은 고딕"/>
+                <a:ea typeface="맑은 고딕"/>
+                <a:cs typeface="맑은 고딕"/>
               </a:rPr>
               <a:t>HCL 코드(원하는 상태)</a:t>
             </a:r>
@@ -9904,6 +10088,8 @@
                   <a:srgbClr val="FFFFFF"/>
                 </a:solidFill>
                 <a:latin typeface="맑은 고딕"/>
+                <a:ea typeface="맑은 고딕"/>
+                <a:cs typeface="맑은 고딕"/>
               </a:rPr>
               <a:t>terraform.tfstate(현재 상태 기록)</a:t>
             </a:r>
@@ -9983,6 +10169,8 @@
                   <a:srgbClr val="FFFFFF"/>
                 </a:solidFill>
                 <a:latin typeface="맑은 고딕"/>
+                <a:ea typeface="맑은 고딕"/>
+                <a:cs typeface="맑은 고딕"/>
               </a:rPr>
               <a:t>비교 후 변경 사항만 적용</a:t>
             </a:r>
@@ -10018,6 +10206,8 @@
                   <a:srgbClr val="5B6373"/>
                 </a:solidFill>
                 <a:latin typeface="맑은 고딕"/>
+                <a:ea typeface="맑은 고딕"/>
+                <a:cs typeface="맑은 고딕"/>
               </a:rPr>
               <a:t>클라우드인프라관리  ·  9주차 3차시</a:t>
             </a:r>
@@ -10053,6 +10243,8 @@
                   <a:srgbClr val="5B6373"/>
                 </a:solidFill>
                 <a:latin typeface="맑은 고딕"/>
+                <a:ea typeface="맑은 고딕"/>
+                <a:cs typeface="맑은 고딕"/>
               </a:rPr>
               <a:t>07 / 13</a:t>
             </a:r>
@@ -10256,6 +10448,8 @@
                   <a:srgbClr val="14213D"/>
                 </a:solidFill>
                 <a:latin typeface="맑은 고딕"/>
+                <a:ea typeface="맑은 고딕"/>
+                <a:cs typeface="맑은 고딕"/>
               </a:rPr>
               <a:t>02</a:t>
             </a:r>
@@ -10291,6 +10485,8 @@
                   <a:srgbClr val="14B8A6"/>
                 </a:solidFill>
                 <a:latin typeface="맑은 고딕"/>
+                <a:ea typeface="맑은 고딕"/>
+                <a:cs typeface="맑은 고딕"/>
               </a:rPr>
               <a:t>PART 2 · State 파일</a:t>
             </a:r>
@@ -10326,6 +10522,8 @@
                   <a:srgbClr val="FFFFFF"/>
                 </a:solidFill>
                 <a:latin typeface="맑은 고딕"/>
+                <a:ea typeface="맑은 고딕"/>
+                <a:cs typeface="맑은 고딕"/>
               </a:rPr>
               <a:t>State가 왜 필요한가</a:t>
             </a:r>
@@ -10365,6 +10563,8 @@
                   <a:srgbClr val="0D9488"/>
                 </a:solidFill>
                 <a:latin typeface="맑은 고딕"/>
+                <a:ea typeface="맑은 고딕"/>
+                <a:cs typeface="맑은 고딕"/>
               </a:rPr>
               <a:t>●  </a:t>
             </a:r>
@@ -10374,6 +10574,8 @@
                   <a:srgbClr val="222733"/>
                 </a:solidFill>
                 <a:latin typeface="맑은 고딕"/>
+                <a:ea typeface="맑은 고딕"/>
+                <a:cs typeface="맑은 고딕"/>
               </a:rPr>
               <a:t>State가 없으면 Terraform은 실제 인프라에 무엇이 있는지 알 방법이 없음</a:t>
             </a:r>
@@ -10390,6 +10592,8 @@
                   <a:srgbClr val="0D9488"/>
                 </a:solidFill>
                 <a:latin typeface="맑은 고딕"/>
+                <a:ea typeface="맑은 고딕"/>
+                <a:cs typeface="맑은 고딕"/>
               </a:rPr>
               <a:t>●  </a:t>
             </a:r>
@@ -10399,6 +10603,8 @@
                   <a:srgbClr val="222733"/>
                 </a:solidFill>
                 <a:latin typeface="맑은 고딕"/>
+                <a:ea typeface="맑은 고딕"/>
+                <a:cs typeface="맑은 고딕"/>
               </a:rPr>
               <a:t>State와 실제 인프라, 코드 이 세 가지를 비교해서 '차이(diff)'만 반영하는 것이 Terraform의 핵심 동작</a:t>
             </a:r>
@@ -10415,6 +10621,8 @@
                   <a:srgbClr val="0D9488"/>
                 </a:solidFill>
                 <a:latin typeface="맑은 고딕"/>
+                <a:ea typeface="맑은 고딕"/>
+                <a:cs typeface="맑은 고딕"/>
               </a:rPr>
               <a:t>●  </a:t>
             </a:r>
@@ -10424,6 +10632,8 @@
                   <a:srgbClr val="222733"/>
                 </a:solidFill>
                 <a:latin typeface="맑은 고딕"/>
+                <a:ea typeface="맑은 고딕"/>
+                <a:cs typeface="맑은 고딕"/>
               </a:rPr>
               <a:t>State 파일을 직접 손으로 수정하는 것은 위험 — 반드시 terraform 명령으로만 다뤄야 함</a:t>
             </a:r>
@@ -10459,6 +10669,8 @@
                   <a:srgbClr val="5B6373"/>
                 </a:solidFill>
                 <a:latin typeface="맑은 고딕"/>
+                <a:ea typeface="맑은 고딕"/>
+                <a:cs typeface="맑은 고딕"/>
               </a:rPr>
               <a:t>클라우드인프라관리  ·  9주차 3차시</a:t>
             </a:r>
@@ -10494,6 +10706,8 @@
                   <a:srgbClr val="5B6373"/>
                 </a:solidFill>
                 <a:latin typeface="맑은 고딕"/>
+                <a:ea typeface="맑은 고딕"/>
+                <a:cs typeface="맑은 고딕"/>
               </a:rPr>
               <a:t>08 / 13</a:t>
             </a:r>
@@ -10697,6 +10911,8 @@
                   <a:srgbClr val="14213D"/>
                 </a:solidFill>
                 <a:latin typeface="맑은 고딕"/>
+                <a:ea typeface="맑은 고딕"/>
+                <a:cs typeface="맑은 고딕"/>
               </a:rPr>
               <a:t>02</a:t>
             </a:r>
@@ -10732,6 +10948,8 @@
                   <a:srgbClr val="14B8A6"/>
                 </a:solidFill>
                 <a:latin typeface="맑은 고딕"/>
+                <a:ea typeface="맑은 고딕"/>
+                <a:cs typeface="맑은 고딕"/>
               </a:rPr>
               <a:t>PART 2 · State 파일</a:t>
             </a:r>
@@ -10767,6 +10985,8 @@
                   <a:srgbClr val="FFFFFF"/>
                 </a:solidFill>
                 <a:latin typeface="맑은 고딕"/>
+                <a:ea typeface="맑은 고딕"/>
+                <a:cs typeface="맑은 고딕"/>
               </a:rPr>
               <a:t>로컬 State의 한계 (10주 예고)</a:t>
             </a:r>
@@ -10806,6 +11026,8 @@
                   <a:srgbClr val="0D9488"/>
                 </a:solidFill>
                 <a:latin typeface="맑은 고딕"/>
+                <a:ea typeface="맑은 고딕"/>
+                <a:cs typeface="맑은 고딕"/>
               </a:rPr>
               <a:t>●  </a:t>
             </a:r>
@@ -10815,6 +11037,8 @@
                   <a:srgbClr val="222733"/>
                 </a:solidFill>
                 <a:latin typeface="맑은 고딕"/>
+                <a:ea typeface="맑은 고딕"/>
+                <a:cs typeface="맑은 고딕"/>
               </a:rPr>
               <a:t>지금까지는 State 파일이 내 VM 로컬 디스크에만 저장됨</a:t>
             </a:r>
@@ -10831,6 +11055,8 @@
                   <a:srgbClr val="0D9488"/>
                 </a:solidFill>
                 <a:latin typeface="맑은 고딕"/>
+                <a:ea typeface="맑은 고딕"/>
+                <a:cs typeface="맑은 고딕"/>
               </a:rPr>
               <a:t>●  </a:t>
             </a:r>
@@ -10840,6 +11066,8 @@
                   <a:srgbClr val="222733"/>
                 </a:solidFill>
                 <a:latin typeface="맑은 고딕"/>
+                <a:ea typeface="맑은 고딕"/>
+                <a:cs typeface="맑은 고딕"/>
               </a:rPr>
               <a:t>여러 사람이 같이 작업하면? 각자의 State가 서로 달라 충돌이 날 수 있음</a:t>
             </a:r>
@@ -10856,6 +11084,8 @@
                   <a:srgbClr val="0D9488"/>
                 </a:solidFill>
                 <a:latin typeface="맑은 고딕"/>
+                <a:ea typeface="맑은 고딕"/>
+                <a:cs typeface="맑은 고딕"/>
               </a:rPr>
               <a:t>●  </a:t>
             </a:r>
@@ -10865,6 +11095,8 @@
                   <a:srgbClr val="222733"/>
                 </a:solidFill>
                 <a:latin typeface="맑은 고딕"/>
+                <a:ea typeface="맑은 고딕"/>
+                <a:cs typeface="맑은 고딕"/>
               </a:rPr>
               <a:t>State 파일 안에는 민감한 정보(비밀번호 등)가 평문으로 포함될 수 있어 보안 위험도 있음</a:t>
             </a:r>
@@ -10944,6 +11176,8 @@
                   <a:srgbClr val="FFFFFF"/>
                 </a:solidFill>
                 <a:latin typeface="맑은 고딕"/>
+                <a:ea typeface="맑은 고딕"/>
+                <a:cs typeface="맑은 고딕"/>
               </a:rPr>
               <a:t>🔮  다음 주 예고</a:t>
             </a:r>
@@ -10979,6 +11213,8 @@
                   <a:srgbClr val="FFFFFF"/>
                 </a:solidFill>
                 <a:latin typeface="맑은 고딕"/>
+                <a:ea typeface="맑은 고딕"/>
+                <a:cs typeface="맑은 고딕"/>
               </a:rPr>
               <a:t>이 문제를 해결하는 방법이 '원격 State' — 10주차에 Terraform Cloud로 직접 다뤄봅니다</a:t>
             </a:r>
@@ -11014,6 +11250,8 @@
                   <a:srgbClr val="5B6373"/>
                 </a:solidFill>
                 <a:latin typeface="맑은 고딕"/>
+                <a:ea typeface="맑은 고딕"/>
+                <a:cs typeface="맑은 고딕"/>
               </a:rPr>
               <a:t>클라우드인프라관리  ·  9주차 3차시</a:t>
             </a:r>
@@ -11049,6 +11287,8 @@
                   <a:srgbClr val="5B6373"/>
                 </a:solidFill>
                 <a:latin typeface="맑은 고딕"/>
+                <a:ea typeface="맑은 고딕"/>
+                <a:cs typeface="맑은 고딕"/>
               </a:rPr>
               <a:t>09 / 13</a:t>
             </a:r>
